--- a/world model.pptx
+++ b/world model.pptx
@@ -12,6 +12,8 @@
     <p:sldId id="260" r:id="rId7"/>
     <p:sldId id="261" r:id="rId8"/>
     <p:sldId id="262" r:id="rId9"/>
+    <p:sldId id="263" r:id="rId10"/>
+    <p:sldId id="264" r:id="rId11"/>
   </p:sldIdLst>
   <p:sldSz cx="12192000" cy="6858000"/>
   <p:notesSz cx="6858000" cy="9144000"/>
@@ -4200,6 +4202,30 @@
         <p:nvPr/>
       </p:nvGrpSpPr>
       <p:grpSpPr/>
+      <p:pic>
+        <p:nvPicPr>
+          <p:cNvPr id="2" name="图片 1"/>
+          <p:cNvPicPr>
+            <a:picLocks noChangeAspect="1"/>
+          </p:cNvPicPr>
+          <p:nvPr/>
+        </p:nvPicPr>
+        <p:blipFill>
+          <a:blip r:embed="rId1"/>
+          <a:stretch>
+            <a:fillRect/>
+          </a:stretch>
+        </p:blipFill>
+        <p:spPr>
+          <a:xfrm>
+            <a:off x="815340" y="657860"/>
+            <a:ext cx="10861040" cy="2694940"/>
+          </a:xfrm>
+          <a:prstGeom prst="rect">
+            <a:avLst/>
+          </a:prstGeom>
+        </p:spPr>
+      </p:pic>
     </p:spTree>
   </p:cSld>
   <p:clrMapOvr>
@@ -4218,6 +4244,353 @@
         <p:nvPr/>
       </p:nvGrpSpPr>
       <p:grpSpPr/>
+      <p:pic>
+        <p:nvPicPr>
+          <p:cNvPr id="2" name="图片 1"/>
+          <p:cNvPicPr>
+            <a:picLocks noChangeAspect="1"/>
+          </p:cNvPicPr>
+          <p:nvPr/>
+        </p:nvPicPr>
+        <p:blipFill>
+          <a:blip r:embed="rId1"/>
+          <a:stretch>
+            <a:fillRect/>
+          </a:stretch>
+        </p:blipFill>
+        <p:spPr>
+          <a:xfrm>
+            <a:off x="1350645" y="172720"/>
+            <a:ext cx="8820150" cy="3048000"/>
+          </a:xfrm>
+          <a:prstGeom prst="rect">
+            <a:avLst/>
+          </a:prstGeom>
+        </p:spPr>
+      </p:pic>
+      <p:sp>
+        <p:nvSpPr>
+          <p:cNvPr id="3" name="文本框 2"/>
+          <p:cNvSpPr txBox="1"/>
+          <p:nvPr/>
+        </p:nvSpPr>
+        <p:spPr>
+          <a:xfrm>
+            <a:off x="829310" y="3159125"/>
+            <a:ext cx="10450830" cy="1753235"/>
+          </a:xfrm>
+          <a:prstGeom prst="rect">
+            <a:avLst/>
+          </a:prstGeom>
+          <a:noFill/>
+        </p:spPr>
+        <p:txBody>
+          <a:bodyPr wrap="square" rtlCol="0">
+            <a:spAutoFit/>
+          </a:bodyPr>
+          <a:p>
+            <a:r>
+              <a:rPr lang="zh-CN" altLang="en-US"/>
+              <a:t>归纳偏置探针的探测框架，意思是：将一个分布作为输入数据分布，在这个大分布里面采样小分布分别训练基础模型，然后再分别训练一个以状态为输入映射到对应输出的</a:t>
+            </a:r>
+            <a:r>
+              <a:rPr lang="en-US" altLang="zh-CN"/>
+              <a:t>Oracle</a:t>
+            </a:r>
+            <a:r>
+              <a:rPr lang="zh-CN" altLang="en-US"/>
+              <a:t>模型，作为评判基础模型是否学到世界模型的对照（因为</a:t>
+            </a:r>
+            <a:r>
+              <a:rPr lang="en-US" altLang="zh-CN"/>
+              <a:t>Oracle</a:t>
+            </a:r>
+            <a:r>
+              <a:rPr lang="zh-CN" altLang="en-US"/>
+              <a:t>模型已知状态，所以他的推理模式与世界模型的推理模式</a:t>
+            </a:r>
+            <a:r>
+              <a:rPr lang="zh-CN" altLang="en-US"/>
+              <a:t>一致），</a:t>
+            </a:r>
+            <a:endParaRPr lang="zh-CN" altLang="en-US"/>
+          </a:p>
+          <a:p>
+            <a:r>
+              <a:rPr lang="zh-CN" altLang="en-US"/>
+              <a:t>采用的指标是外推可预测性，也就是说从一个输出预测另一个输出的</a:t>
+            </a:r>
+            <a:r>
+              <a:rPr lang="zh-CN" altLang="en-US"/>
+              <a:t>能力。</a:t>
+            </a:r>
+            <a:endParaRPr lang="zh-CN" altLang="en-US"/>
+          </a:p>
+          <a:p>
+            <a:r>
+              <a:rPr lang="zh-CN" altLang="en-US"/>
+              <a:t>那么评判标准模型是否学到基础模型的指标就是：在一段</a:t>
+            </a:r>
+            <a:r>
+              <a:rPr lang="en-US" altLang="zh-CN"/>
+              <a:t>Oracle</a:t>
+            </a:r>
+            <a:r>
+              <a:rPr lang="zh-CN" altLang="en-US"/>
+              <a:t>模型的外推可预测性指标的范围内，基础模型的外推可预测性指标是否与</a:t>
+            </a:r>
+            <a:r>
+              <a:rPr lang="en-US" altLang="zh-CN"/>
+              <a:t>Oracle</a:t>
+            </a:r>
+            <a:r>
+              <a:rPr lang="zh-CN" altLang="en-US"/>
+              <a:t>模型的外推可预测性指标</a:t>
+            </a:r>
+            <a:r>
+              <a:rPr lang="zh-CN" altLang="en-US"/>
+              <a:t>相近。</a:t>
+            </a:r>
+            <a:endParaRPr lang="zh-CN" altLang="en-US"/>
+          </a:p>
+        </p:txBody>
+      </p:sp>
+      <p:pic>
+        <p:nvPicPr>
+          <p:cNvPr id="4" name="图片 3"/>
+          <p:cNvPicPr>
+            <a:picLocks noChangeAspect="1"/>
+          </p:cNvPicPr>
+          <p:nvPr/>
+        </p:nvPicPr>
+        <p:blipFill>
+          <a:blip r:embed="rId2"/>
+          <a:stretch>
+            <a:fillRect/>
+          </a:stretch>
+        </p:blipFill>
+        <p:spPr>
+          <a:xfrm>
+            <a:off x="749935" y="4912360"/>
+            <a:ext cx="4610100" cy="457200"/>
+          </a:xfrm>
+          <a:prstGeom prst="rect">
+            <a:avLst/>
+          </a:prstGeom>
+        </p:spPr>
+      </p:pic>
+      <p:pic>
+        <p:nvPicPr>
+          <p:cNvPr id="5" name="图片 4"/>
+          <p:cNvPicPr>
+            <a:picLocks noChangeAspect="1"/>
+          </p:cNvPicPr>
+          <p:nvPr/>
+        </p:nvPicPr>
+        <p:blipFill>
+          <a:blip r:embed="rId3"/>
+          <a:stretch>
+            <a:fillRect/>
+          </a:stretch>
+        </p:blipFill>
+        <p:spPr>
+          <a:xfrm>
+            <a:off x="3646170" y="6070600"/>
+            <a:ext cx="4229100" cy="314325"/>
+          </a:xfrm>
+          <a:prstGeom prst="rect">
+            <a:avLst/>
+          </a:prstGeom>
+        </p:spPr>
+      </p:pic>
+      <p:pic>
+        <p:nvPicPr>
+          <p:cNvPr id="6" name="图片 5"/>
+          <p:cNvPicPr>
+            <a:picLocks noChangeAspect="1"/>
+          </p:cNvPicPr>
+          <p:nvPr/>
+        </p:nvPicPr>
+        <p:blipFill>
+          <a:blip r:embed="rId4"/>
+          <a:stretch>
+            <a:fillRect/>
+          </a:stretch>
+        </p:blipFill>
+        <p:spPr>
+          <a:xfrm>
+            <a:off x="6106795" y="4973955"/>
+            <a:ext cx="4572000" cy="333375"/>
+          </a:xfrm>
+          <a:prstGeom prst="rect">
+            <a:avLst/>
+          </a:prstGeom>
+        </p:spPr>
+      </p:pic>
+      <p:pic>
+        <p:nvPicPr>
+          <p:cNvPr id="7" name="图片 6"/>
+          <p:cNvPicPr>
+            <a:picLocks noChangeAspect="1"/>
+          </p:cNvPicPr>
+          <p:nvPr/>
+        </p:nvPicPr>
+        <p:blipFill>
+          <a:blip r:embed="rId5"/>
+          <a:stretch>
+            <a:fillRect/>
+          </a:stretch>
+        </p:blipFill>
+        <p:spPr>
+          <a:xfrm>
+            <a:off x="3646170" y="5737860"/>
+            <a:ext cx="4257675" cy="304800"/>
+          </a:xfrm>
+          <a:prstGeom prst="rect">
+            <a:avLst/>
+          </a:prstGeom>
+        </p:spPr>
+      </p:pic>
+      <p:sp>
+        <p:nvSpPr>
+          <p:cNvPr id="8" name="文本框 7"/>
+          <p:cNvSpPr txBox="1"/>
+          <p:nvPr/>
+        </p:nvSpPr>
+        <p:spPr>
+          <a:xfrm>
+            <a:off x="1105535" y="5369560"/>
+            <a:ext cx="4064000" cy="368300"/>
+          </a:xfrm>
+          <a:prstGeom prst="rect">
+            <a:avLst/>
+          </a:prstGeom>
+          <a:noFill/>
+        </p:spPr>
+        <p:txBody>
+          <a:bodyPr wrap="square" rtlCol="0">
+            <a:spAutoFit/>
+          </a:bodyPr>
+          <a:p>
+            <a:r>
+              <a:rPr lang="zh-CN" altLang="en-US"/>
+              <a:t>外推可预测性（</a:t>
+            </a:r>
+            <a:r>
+              <a:rPr lang="zh-CN" altLang="en-US"/>
+              <a:t>基础模型）</a:t>
+            </a:r>
+            <a:endParaRPr lang="zh-CN" altLang="en-US"/>
+          </a:p>
+        </p:txBody>
+      </p:sp>
+      <p:sp>
+        <p:nvSpPr>
+          <p:cNvPr id="9" name="文本框 8"/>
+          <p:cNvSpPr txBox="1"/>
+          <p:nvPr/>
+        </p:nvSpPr>
+        <p:spPr>
+          <a:xfrm>
+            <a:off x="6882130" y="5307330"/>
+            <a:ext cx="4064000" cy="368300"/>
+          </a:xfrm>
+          <a:prstGeom prst="rect">
+            <a:avLst/>
+          </a:prstGeom>
+          <a:noFill/>
+        </p:spPr>
+        <p:txBody>
+          <a:bodyPr wrap="square" rtlCol="0">
+            <a:spAutoFit/>
+          </a:bodyPr>
+          <a:p>
+            <a:r>
+              <a:rPr lang="zh-CN" altLang="en-US"/>
+              <a:t>外推可预测性（</a:t>
+            </a:r>
+            <a:r>
+              <a:rPr lang="en-US" altLang="zh-CN"/>
+              <a:t>Oracle</a:t>
+            </a:r>
+            <a:r>
+              <a:rPr lang="zh-CN" altLang="en-US"/>
+              <a:t>模型）</a:t>
+            </a:r>
+            <a:endParaRPr lang="zh-CN" altLang="en-US"/>
+          </a:p>
+        </p:txBody>
+      </p:sp>
+      <p:sp>
+        <p:nvSpPr>
+          <p:cNvPr id="10" name="文本框 9"/>
+          <p:cNvSpPr txBox="1"/>
+          <p:nvPr/>
+        </p:nvSpPr>
+        <p:spPr>
+          <a:xfrm>
+            <a:off x="3597910" y="6412865"/>
+            <a:ext cx="4794250" cy="368300"/>
+          </a:xfrm>
+          <a:prstGeom prst="rect">
+            <a:avLst/>
+          </a:prstGeom>
+          <a:noFill/>
+        </p:spPr>
+        <p:txBody>
+          <a:bodyPr wrap="square" rtlCol="0">
+            <a:spAutoFit/>
+          </a:bodyPr>
+          <a:p>
+            <a:r>
+              <a:rPr lang="en-US" altLang="zh-CN"/>
+              <a:t>Oracle</a:t>
+            </a:r>
+            <a:r>
+              <a:rPr lang="zh-CN" altLang="en-US"/>
+              <a:t>模型的训练（已知输入数据的</a:t>
+            </a:r>
+            <a:r>
+              <a:rPr lang="zh-CN" altLang="en-US"/>
+              <a:t>状态）</a:t>
+            </a:r>
+            <a:endParaRPr lang="zh-CN" altLang="en-US"/>
+          </a:p>
+        </p:txBody>
+      </p:sp>
+      <p:sp>
+        <p:nvSpPr>
+          <p:cNvPr id="11" name="文本框 10"/>
+          <p:cNvSpPr txBox="1"/>
+          <p:nvPr/>
+        </p:nvSpPr>
+        <p:spPr>
+          <a:xfrm>
+            <a:off x="7903845" y="5713730"/>
+            <a:ext cx="4064000" cy="368300"/>
+          </a:xfrm>
+          <a:prstGeom prst="rect">
+            <a:avLst/>
+          </a:prstGeom>
+          <a:noFill/>
+        </p:spPr>
+        <p:txBody>
+          <a:bodyPr wrap="square" rtlCol="0">
+            <a:spAutoFit/>
+          </a:bodyPr>
+          <a:p>
+            <a:r>
+              <a:rPr lang="zh-CN" altLang="en-US"/>
+              <a:t>归纳</a:t>
+            </a:r>
+            <a:r>
+              <a:rPr lang="zh-CN" altLang="en-US"/>
+              <a:t>偏置</a:t>
+            </a:r>
+            <a:endParaRPr lang="zh-CN" altLang="en-US"/>
+          </a:p>
+        </p:txBody>
+      </p:sp>
     </p:spTree>
   </p:cSld>
   <p:clrMapOvr>
@@ -4227,6 +4600,217 @@
 </file>
 
 <file path=ppt/slides/slide7.xml><?xml version="1.0" encoding="utf-8"?>
+<p:sld xmlns:a="http://schemas.openxmlformats.org/drawingml/2006/main" xmlns:r="http://schemas.openxmlformats.org/officeDocument/2006/relationships" xmlns:p="http://schemas.openxmlformats.org/presentationml/2006/main">
+  <p:cSld>
+    <p:spTree>
+      <p:nvGrpSpPr>
+        <p:cNvPr id="1" name=""/>
+        <p:cNvGrpSpPr/>
+        <p:nvPr/>
+      </p:nvGrpSpPr>
+      <p:grpSpPr/>
+      <p:pic>
+        <p:nvPicPr>
+          <p:cNvPr id="2" name="图片 1"/>
+          <p:cNvPicPr>
+            <a:picLocks noChangeAspect="1"/>
+          </p:cNvPicPr>
+          <p:nvPr/>
+        </p:nvPicPr>
+        <p:blipFill>
+          <a:blip r:embed="rId1"/>
+          <a:stretch>
+            <a:fillRect/>
+          </a:stretch>
+        </p:blipFill>
+        <p:spPr>
+          <a:xfrm>
+            <a:off x="2314575" y="271780"/>
+            <a:ext cx="7562850" cy="2874645"/>
+          </a:xfrm>
+          <a:prstGeom prst="rect">
+            <a:avLst/>
+          </a:prstGeom>
+        </p:spPr>
+      </p:pic>
+      <p:sp>
+        <p:nvSpPr>
+          <p:cNvPr id="3" name="文本框 2"/>
+          <p:cNvSpPr txBox="1"/>
+          <p:nvPr/>
+        </p:nvSpPr>
+        <p:spPr>
+          <a:xfrm>
+            <a:off x="499745" y="3244850"/>
+            <a:ext cx="9315450" cy="645160"/>
+          </a:xfrm>
+          <a:prstGeom prst="rect">
+            <a:avLst/>
+          </a:prstGeom>
+          <a:noFill/>
+        </p:spPr>
+        <p:txBody>
+          <a:bodyPr wrap="square" rtlCol="0">
+            <a:spAutoFit/>
+          </a:bodyPr>
+          <a:p>
+            <a:r>
+              <a:rPr lang="zh-CN" altLang="en-US"/>
+              <a:t>模型可能学到了一些局部的、任务相关的伪规律或启发式，但没有学到一个统一、紧凑、可迁移的 </a:t>
+            </a:r>
+            <a:r>
+              <a:rPr lang="en-US" altLang="zh-CN"/>
+              <a:t>Newtonian world model。</a:t>
+            </a:r>
+            <a:endParaRPr lang="en-US" altLang="zh-CN"/>
+          </a:p>
+        </p:txBody>
+      </p:sp>
+    </p:spTree>
+  </p:cSld>
+  <p:clrMapOvr>
+    <a:masterClrMapping/>
+  </p:clrMapOvr>
+</p:sld>
+</file>
+
+<file path=ppt/slides/slide8.xml><?xml version="1.0" encoding="utf-8"?>
+<p:sld xmlns:a="http://schemas.openxmlformats.org/drawingml/2006/main" xmlns:r="http://schemas.openxmlformats.org/officeDocument/2006/relationships" xmlns:p="http://schemas.openxmlformats.org/presentationml/2006/main">
+  <p:cSld>
+    <p:spTree>
+      <p:nvGrpSpPr>
+        <p:cNvPr id="1" name=""/>
+        <p:cNvGrpSpPr/>
+        <p:nvPr/>
+      </p:nvGrpSpPr>
+      <p:grpSpPr/>
+      <p:pic>
+        <p:nvPicPr>
+          <p:cNvPr id="3" name="图片 2"/>
+          <p:cNvPicPr>
+            <a:picLocks noChangeAspect="1"/>
+          </p:cNvPicPr>
+          <p:nvPr/>
+        </p:nvPicPr>
+        <p:blipFill>
+          <a:blip r:embed="rId1"/>
+          <a:stretch>
+            <a:fillRect/>
+          </a:stretch>
+        </p:blipFill>
+        <p:spPr>
+          <a:xfrm>
+            <a:off x="396240" y="361315"/>
+            <a:ext cx="11656060" cy="2994660"/>
+          </a:xfrm>
+          <a:prstGeom prst="rect">
+            <a:avLst/>
+          </a:prstGeom>
+        </p:spPr>
+      </p:pic>
+      <p:sp>
+        <p:nvSpPr>
+          <p:cNvPr id="4" name="文本框 3"/>
+          <p:cNvSpPr txBox="1"/>
+          <p:nvPr/>
+        </p:nvSpPr>
+        <p:spPr>
+          <a:xfrm>
+            <a:off x="744220" y="4474845"/>
+            <a:ext cx="9655810" cy="922020"/>
+          </a:xfrm>
+          <a:prstGeom prst="rect">
+            <a:avLst/>
+          </a:prstGeom>
+          <a:noFill/>
+        </p:spPr>
+        <p:txBody>
+          <a:bodyPr wrap="square" rtlCol="0">
+            <a:spAutoFit/>
+          </a:bodyPr>
+          <a:p>
+            <a:r>
+              <a:rPr lang="zh-CN" altLang="en-US"/>
+              <a:t>这说明 </a:t>
+            </a:r>
+            <a:r>
+              <a:rPr lang="en-US" altLang="zh-CN"/>
+              <a:t>foundation model </a:t>
+            </a:r>
+            <a:r>
+              <a:rPr lang="zh-CN" altLang="en-US"/>
+              <a:t>的学习结果强烈受训练目标诱导。模型可能优先学习能够优化当前任务表现的 </a:t>
+            </a:r>
+            <a:r>
+              <a:rPr lang="en-US" altLang="zh-CN"/>
+              <a:t>task-specific heuristics，</a:t>
+            </a:r>
+            <a:r>
+              <a:rPr lang="zh-CN" altLang="en-US"/>
+              <a:t>而不是完整恢复任务背后的底层状态空间或因果机制。因此，高预测性能并不能直接说明模型具有真正的 </a:t>
+            </a:r>
+            <a:r>
+              <a:rPr lang="en-US" altLang="zh-CN"/>
+              <a:t>world model。</a:t>
+            </a:r>
+            <a:endParaRPr lang="en-US" altLang="zh-CN"/>
+          </a:p>
+        </p:txBody>
+      </p:sp>
+      <p:sp>
+        <p:nvSpPr>
+          <p:cNvPr id="5" name="文本框 4"/>
+          <p:cNvSpPr txBox="1"/>
+          <p:nvPr/>
+        </p:nvSpPr>
+        <p:spPr>
+          <a:xfrm>
+            <a:off x="744220" y="3429000"/>
+            <a:ext cx="11308080" cy="922020"/>
+          </a:xfrm>
+          <a:prstGeom prst="rect">
+            <a:avLst/>
+          </a:prstGeom>
+          <a:noFill/>
+        </p:spPr>
+        <p:txBody>
+          <a:bodyPr wrap="square" rtlCol="0">
+            <a:spAutoFit/>
+          </a:bodyPr>
+          <a:p>
+            <a:r>
+              <a:rPr lang="zh-CN" altLang="en-US"/>
+              <a:t>作者发现：即使模型的 </a:t>
+            </a:r>
+            <a:r>
+              <a:rPr lang="en-US" altLang="zh-CN"/>
+              <a:t>board reconstruction </a:t>
+            </a:r>
+            <a:r>
+              <a:rPr lang="zh-CN" altLang="en-US"/>
+              <a:t>不完美，也就是棋盘格子预测有错误，它仍然经常能让 </a:t>
+            </a:r>
+            <a:r>
+              <a:rPr lang="en-US" altLang="zh-CN"/>
+              <a:t>valid next moves </a:t>
+            </a:r>
+            <a:r>
+              <a:rPr lang="zh-CN" altLang="en-US"/>
+              <a:t>和真实棋盘一致。文章明确说，即使预测棋盘是错的，合法下一步集合也经常和真实棋盘匹配；模型不是恢复完整棋盘，而是恢复了“足够计算合法下一步”的棋盘信息。</a:t>
+            </a:r>
+            <a:endParaRPr lang="zh-CN" altLang="en-US"/>
+          </a:p>
+        </p:txBody>
+      </p:sp>
+    </p:spTree>
+  </p:cSld>
+  <p:clrMapOvr>
+    <a:masterClrMapping/>
+  </p:clrMapOvr>
+</p:sld>
+</file>
+
+<file path=ppt/slides/slide9.xml><?xml version="1.0" encoding="utf-8"?>
 <p:sld xmlns:a="http://schemas.openxmlformats.org/drawingml/2006/main" xmlns:r="http://schemas.openxmlformats.org/officeDocument/2006/relationships" xmlns:p="http://schemas.openxmlformats.org/presentationml/2006/main">
   <p:cSld>
     <p:spTree>
